--- a/aralik-cedes-pano.pptx
+++ b/aralik-cedes-pano.pptx
@@ -9,6 +9,7 @@
     <p:sldId id="257" r:id="rId3"/>
     <p:sldId id="258" r:id="rId4"/>
     <p:sldId id="259" r:id="rId5"/>
+    <p:sldId id="261" r:id="rId12"/>
     <p:sldId id="260" r:id="rId6"/>
   </p:sldIdLst>
   <p:notesMasterIdLst>
@@ -1252,6 +1253,10 @@
           </a:solidFill>
           <a:ln/>
         </p:spPr>
+        <p:txBody>
+          <a:bodyPr/>
+          <a:p/>
+        </p:txBody>
       </p:sp>
       <p:sp>
         <p:nvSpPr>
@@ -1274,6 +1279,10 @@
           </a:solidFill>
           <a:ln/>
         </p:spPr>
+        <p:txBody>
+          <a:bodyPr/>
+          <a:p/>
+        </p:txBody>
       </p:sp>
       <p:sp>
         <p:nvSpPr>
@@ -1347,7 +1356,7 @@
                 <a:ea typeface="Calibri" pitchFamily="34" charset="-122"/>
                 <a:cs typeface="Calibri" pitchFamily="34" charset="-120"/>
               </a:rPr>
-              <a:t>ARALIK AYI  •  SORUMLULUK • TEMİZLİK • SAĞLIKLI YAŞAM</a:t>
+              <a:t>ARALIK AYI  •  DUYARLILIK • ADALET • ÖZGÜRLÜK • DÜRÜSTLÜK</a:t>
             </a:r>
             <a:endParaRPr lang="en-US" sz="2000" dirty="0"/>
           </a:p>
@@ -1383,7 +1392,7 @@
                   <a:srgbClr val="FFFFFF"/>
                 </a:solidFill>
               </a:rPr>
-              <a:t>2025 - 2026 Eğitim Öğretim Yılı</a:t>
+              <a:t>2026 - 2027 Eğitim Öğretim Yılı</a:t>
             </a:r>
             <a:endParaRPr lang="en-US" sz="1600" dirty="0"/>
           </a:p>
@@ -1398,6 +1407,384 @@
 </file>
 
 <file path=ppt/slides/slide2.xml><?xml version="1.0" encoding="utf-8"?>
+<p:sld xmlns:a="http://schemas.openxmlformats.org/drawingml/2006/main" xmlns:r="http://schemas.openxmlformats.org/officeDocument/2006/relationships" xmlns:p="http://schemas.openxmlformats.org/presentationml/2006/main">
+  <p:cSld name="Slide 3">
+    <p:bg>
+      <p:bgPr>
+        <a:solidFill>
+          <a:srgbClr val="FFFFFF"/>
+        </a:solidFill>
+      </p:bgPr>
+    </p:bg>
+    <p:spTree>
+      <p:nvGrpSpPr>
+        <p:cNvPr id="1" name=""/>
+        <p:cNvGrpSpPr/>
+        <p:nvPr/>
+      </p:nvGrpSpPr>
+      <p:grpSpPr>
+        <a:xfrm>
+          <a:off x="0" y="0"/>
+          <a:ext cx="0" cy="0"/>
+          <a:chOff x="0" y="0"/>
+          <a:chExt cx="0" cy="0"/>
+        </a:xfrm>
+      </p:grpSpPr>
+      <p:sp>
+        <p:nvSpPr>
+          <p:cNvPr id="2" name="Shape 0"/>
+          <p:cNvSpPr/>
+          <p:nvPr/>
+        </p:nvSpPr>
+        <p:spPr>
+          <a:xfrm>
+            <a:off x="0" y="0"/>
+            <a:ext cx="3840480" cy="6858000"/>
+          </a:xfrm>
+          <a:prstGeom prst="rect">
+            <a:avLst/>
+          </a:prstGeom>
+          <a:solidFill>
+            <a:srgbClr val="B85042"/>
+          </a:solidFill>
+          <a:ln/>
+        </p:spPr>
+        <p:txBody>
+          <a:bodyPr/>
+          <a:p/>
+        </p:txBody>
+      </p:sp>
+      <p:sp>
+        <p:nvSpPr>
+          <p:cNvPr id="3" name="Text 1"/>
+          <p:cNvSpPr/>
+          <p:nvPr/>
+        </p:nvSpPr>
+        <p:spPr>
+          <a:xfrm>
+            <a:off x="274320" y="457200"/>
+            <a:ext cx="3291840" cy="1645920"/>
+          </a:xfrm>
+          <a:prstGeom prst="rect">
+            <a:avLst/>
+          </a:prstGeom>
+          <a:noFill/>
+          <a:ln/>
+        </p:spPr>
+        <p:txBody>
+          <a:bodyPr wrap="square" rtlCol="0" anchor="ctr"/>
+          <a:lstStyle/>
+          <a:p>
+            <a:pPr algn="ctr" indent="0" marL="0">
+              <a:buNone/>
+            </a:pPr>
+            <a:r>
+              <a:rPr lang="en-US" sz="8000" dirty="0">
+                <a:solidFill>
+                  <a:srgbClr val="000000"/>
+                </a:solidFill>
+              </a:rPr>
+              <a:t>🌍</a:t>
+            </a:r>
+            <a:endParaRPr lang="en-US" sz="8000" dirty="0"/>
+          </a:p>
+        </p:txBody>
+      </p:sp>
+      <p:sp>
+        <p:nvSpPr>
+          <p:cNvPr id="4" name="Text 2"/>
+          <p:cNvSpPr/>
+          <p:nvPr/>
+        </p:nvSpPr>
+        <p:spPr>
+          <a:xfrm>
+            <a:off x="274320" y="2194560"/>
+            <a:ext cx="3291840" cy="914400"/>
+          </a:xfrm>
+          <a:prstGeom prst="rect">
+            <a:avLst/>
+          </a:prstGeom>
+          <a:noFill/>
+          <a:ln/>
+        </p:spPr>
+        <p:txBody>
+          <a:bodyPr wrap="square" rtlCol="0" anchor="ctr"/>
+          <a:lstStyle/>
+          <a:p>
+            <a:pPr algn="ctr" indent="0" marL="0">
+              <a:buNone/>
+            </a:pPr>
+            <a:r>
+              <a:rPr lang="en-US" sz="2600" b="1" dirty="0">
+                <a:solidFill>
+                  <a:srgbClr val="FFFFFF"/>
+                </a:solidFill>
+                <a:latin typeface="Cambria" pitchFamily="34" charset="0"/>
+                <a:ea typeface="Cambria" pitchFamily="34" charset="-122"/>
+                <a:cs typeface="Cambria" pitchFamily="34" charset="-120"/>
+              </a:rPr>
+              <a:t>DUYARLILIK</a:t>
+            </a:r>
+            <a:endParaRPr lang="en-US" sz="2600" dirty="0"/>
+          </a:p>
+        </p:txBody>
+      </p:sp>
+      <p:sp>
+        <p:nvSpPr>
+          <p:cNvPr id="5" name="Text 3"/>
+          <p:cNvSpPr/>
+          <p:nvPr/>
+        </p:nvSpPr>
+        <p:spPr>
+          <a:xfrm>
+            <a:off x="274320" y="3017520"/>
+            <a:ext cx="3291840" cy="1280160"/>
+          </a:xfrm>
+          <a:prstGeom prst="rect">
+            <a:avLst/>
+          </a:prstGeom>
+          <a:noFill/>
+          <a:ln/>
+        </p:spPr>
+        <p:txBody>
+          <a:bodyPr wrap="square" rtlCol="0" anchor="ctr"/>
+          <a:lstStyle/>
+          <a:p>
+            <a:pPr algn="ctr" indent="0" marL="0">
+              <a:buNone/>
+            </a:pPr>
+            <a:r>
+              <a:rPr lang="en-US" sz="1500" i="1" dirty="0">
+                <a:solidFill>
+                  <a:srgbClr val="FFFFFF"/>
+                </a:solidFill>
+              </a:rPr>
+              <a:t>Çevreye ve İnsanlara Duyarlı Olmak</a:t>
+            </a:r>
+            <a:endParaRPr lang="en-US" sz="1500" dirty="0"/>
+          </a:p>
+        </p:txBody>
+      </p:sp>
+      <p:sp>
+        <p:nvSpPr>
+          <p:cNvPr id="6" name="Shape 4"/>
+          <p:cNvSpPr/>
+          <p:nvPr/>
+        </p:nvSpPr>
+        <p:spPr>
+          <a:xfrm>
+            <a:off x="548640" y="4846320"/>
+            <a:ext cx="2743200" cy="1280160"/>
+          </a:xfrm>
+          <a:prstGeom prst="roundRect">
+            <a:avLst>
+              <a:gd name="adj" fmla="val 7143"/>
+            </a:avLst>
+          </a:prstGeom>
+          <a:solidFill>
+            <a:srgbClr val="FFFFFF">
+              <a:alpha val="85000"/>
+            </a:srgbClr>
+          </a:solidFill>
+          <a:ln/>
+        </p:spPr>
+        <p:txBody>
+          <a:bodyPr/>
+          <a:p/>
+        </p:txBody>
+      </p:sp>
+      <p:sp>
+        <p:nvSpPr>
+          <p:cNvPr id="7" name="Text 5"/>
+          <p:cNvSpPr/>
+          <p:nvPr/>
+        </p:nvSpPr>
+        <p:spPr>
+          <a:xfrm>
+            <a:off x="548640" y="4846320"/>
+            <a:ext cx="2743200" cy="1280160"/>
+          </a:xfrm>
+          <a:prstGeom prst="rect">
+            <a:avLst/>
+          </a:prstGeom>
+          <a:noFill/>
+          <a:ln/>
+        </p:spPr>
+        <p:txBody>
+          <a:bodyPr wrap="square" rtlCol="0" anchor="ctr"/>
+          <a:lstStyle/>
+          <a:p>
+            <a:pPr algn="ctr" indent="0" marL="0">
+              <a:buNone/>
+            </a:pPr>
+            <a:r>
+              <a:rPr lang="en-US" sz="1600" b="1" dirty="0">
+                <a:solidFill>
+                  <a:srgbClr val="2B2B2B"/>
+                </a:solidFill>
+              </a:rPr>
+              <a:t>9. HAFTA</a:t>
+            </a:r>
+            <a:endParaRPr lang="en-US" sz="1600" dirty="0"/>
+          </a:p>
+          <a:p>
+            <a:pPr algn="ctr" indent="0" marL="0">
+              <a:buNone/>
+            </a:pPr>
+            <a:r>
+              <a:rPr lang="en-US" sz="1600" b="1" dirty="0">
+                <a:solidFill>
+                  <a:srgbClr val="2B2B2B"/>
+                </a:solidFill>
+              </a:rPr>
+              <a:t>30 Kasım – 4 Aralık</a:t>
+            </a:r>
+            <a:endParaRPr lang="en-US" sz="1600" dirty="0"/>
+          </a:p>
+        </p:txBody>
+      </p:sp>
+      <p:sp>
+        <p:nvSpPr>
+          <p:cNvPr id="8" name="Text 6"/>
+          <p:cNvSpPr/>
+          <p:nvPr/>
+        </p:nvSpPr>
+        <p:spPr>
+          <a:xfrm>
+            <a:off x="4206240" y="457200"/>
+            <a:ext cx="7498080" cy="1188720"/>
+          </a:xfrm>
+          <a:prstGeom prst="rect">
+            <a:avLst/>
+          </a:prstGeom>
+          <a:noFill/>
+          <a:ln/>
+        </p:spPr>
+        <p:txBody>
+          <a:bodyPr wrap="square" rtlCol="0" anchor="ctr"/>
+          <a:lstStyle/>
+          <a:p>
+            <a:pPr indent="0" marL="0">
+              <a:buNone/>
+            </a:pPr>
+            <a:r>
+              <a:rPr lang="en-US" sz="2200" b="1" i="1" dirty="0">
+                <a:solidFill>
+                  <a:srgbClr val="1F4E79"/>
+                </a:solidFill>
+                <a:latin typeface="Cambria" pitchFamily="34" charset="0"/>
+                <a:ea typeface="Cambria" pitchFamily="34" charset="-122"/>
+                <a:cs typeface="Cambria" pitchFamily="34" charset="-120"/>
+              </a:rPr>
+              <a:t>"Duyarlılık, fark ettiğimizde harekete geçmektir."</a:t>
+            </a:r>
+            <a:endParaRPr lang="en-US" sz="2200" dirty="0"/>
+          </a:p>
+        </p:txBody>
+      </p:sp>
+      <p:sp>
+        <p:nvSpPr>
+          <p:cNvPr id="9" name="Text 7"/>
+          <p:cNvSpPr/>
+          <p:nvPr/>
+        </p:nvSpPr>
+        <p:spPr>
+          <a:xfrm>
+            <a:off x="4206240" y="1828800"/>
+            <a:ext cx="7498080" cy="4389120"/>
+          </a:xfrm>
+          <a:prstGeom prst="rect">
+            <a:avLst/>
+          </a:prstGeom>
+          <a:noFill/>
+          <a:ln/>
+        </p:spPr>
+        <p:txBody>
+          <a:bodyPr wrap="square" rtlCol="0" anchor="ctr"/>
+          <a:lstStyle/>
+          <a:p>
+            <a:pPr marL="342900" indent="-342900">
+              <a:spcAft>
+                <a:spcPts val="1200"/>
+              </a:spcAft>
+              <a:buSzPct val="100000"/>
+              <a:buChar char="•"/>
+            </a:pPr>
+            <a:r>
+              <a:rPr lang="en-US" sz="1700" dirty="0">
+                <a:solidFill>
+                  <a:srgbClr val="2B2B2B"/>
+                </a:solidFill>
+              </a:rPr>
+              <a:t>Çevremizdeki soruna kayıtsız kalmayız.</a:t>
+            </a:r>
+            <a:endParaRPr lang="en-US" sz="1700" dirty="0"/>
+          </a:p>
+          <a:p>
+            <a:pPr marL="342900" indent="-342900">
+              <a:spcAft>
+                <a:spcPts val="1200"/>
+              </a:spcAft>
+              <a:buSzPct val="100000"/>
+              <a:buChar char="•"/>
+            </a:pPr>
+            <a:r>
+              <a:rPr lang="en-US" sz="1700" dirty="0">
+                <a:solidFill>
+                  <a:srgbClr val="2B2B2B"/>
+                </a:solidFill>
+              </a:rPr>
+              <a:t>Doğaya ve canlılara zarar vermemeye özen gösteririz.</a:t>
+            </a:r>
+            <a:endParaRPr lang="en-US" sz="1700" dirty="0"/>
+          </a:p>
+          <a:p>
+            <a:pPr marL="342900" indent="-342900">
+              <a:spcAft>
+                <a:spcPts val="1200"/>
+              </a:spcAft>
+              <a:buSzPct val="100000"/>
+              <a:buChar char="•"/>
+            </a:pPr>
+            <a:r>
+              <a:rPr lang="en-US" sz="1700" dirty="0">
+                <a:solidFill>
+                  <a:srgbClr val="2B2B2B"/>
+                </a:solidFill>
+              </a:rPr>
+              <a:t>Yardıma ihtiyacı olanı fark ederiz.</a:t>
+            </a:r>
+            <a:endParaRPr lang="en-US" sz="1700" dirty="0"/>
+          </a:p>
+          <a:p>
+            <a:pPr marL="342900" indent="-342900">
+              <a:spcAft>
+                <a:spcPts val="1200"/>
+              </a:spcAft>
+              <a:buSzPct val="100000"/>
+              <a:buChar char="•"/>
+            </a:pPr>
+            <a:r>
+              <a:rPr lang="en-US" sz="1700" dirty="0">
+                <a:solidFill>
+                  <a:srgbClr val="2B2B2B"/>
+                </a:solidFill>
+              </a:rPr>
+              <a:t>Küçük bir adım, büyük bir değişimin başlangıcıdır.</a:t>
+            </a:r>
+            <a:endParaRPr lang="en-US" sz="1700" dirty="0"/>
+          </a:p>
+        </p:txBody>
+      </p:sp>
+    </p:spTree>
+  </p:cSld>
+  <p:clrMapOvr>
+    <a:masterClrMapping/>
+  </p:clrMapOvr>
+</p:sld>
+</file>
+
+<file path=ppt/slides/slide3.xml><?xml version="1.0" encoding="utf-8"?>
 <p:sld xmlns:a="http://schemas.openxmlformats.org/drawingml/2006/main" xmlns:r="http://schemas.openxmlformats.org/officeDocument/2006/relationships" xmlns:p="http://schemas.openxmlformats.org/presentationml/2006/main">
   <p:cSld name="Slide 2">
     <p:bg>
@@ -1436,10 +1823,14 @@
             <a:avLst/>
           </a:prstGeom>
           <a:solidFill>
-            <a:srgbClr val="6D2E46"/>
+            <a:srgbClr val="028090"/>
           </a:solidFill>
           <a:ln/>
         </p:spPr>
+        <p:txBody>
+          <a:bodyPr/>
+          <a:p/>
+        </p:txBody>
       </p:sp>
       <p:sp>
         <p:nvSpPr>
@@ -1471,7 +1862,7 @@
                   <a:srgbClr val="000000"/>
                 </a:solidFill>
               </a:rPr>
-              <a:t>🌿</a:t>
+              <a:t>⚖️</a:t>
             </a:r>
             <a:endParaRPr lang="en-US" sz="8000" dirty="0"/>
           </a:p>
@@ -1510,7 +1901,7 @@
                 <a:ea typeface="Cambria" pitchFamily="34" charset="-122"/>
                 <a:cs typeface="Cambria" pitchFamily="34" charset="-120"/>
               </a:rPr>
-              <a:t>SORUMLULUK</a:t>
+              <a:t>ADALET</a:t>
             </a:r>
             <a:endParaRPr lang="en-US" sz="2600" dirty="0"/>
           </a:p>
@@ -1546,7 +1937,7 @@
                   <a:srgbClr val="FFFFFF"/>
                 </a:solidFill>
               </a:rPr>
-              <a:t>Üzerimize Düşeni Yapmak</a:t>
+              <a:t>Herkese Hakkı Kadar Davranmak</a:t>
             </a:r>
             <a:endParaRPr lang="en-US" sz="1500" dirty="0"/>
           </a:p>
@@ -1575,6 +1966,10 @@
           </a:solidFill>
           <a:ln/>
         </p:spPr>
+        <p:txBody>
+          <a:bodyPr/>
+          <a:p/>
+        </p:txBody>
       </p:sp>
       <p:sp>
         <p:nvSpPr>
@@ -1606,7 +2001,7 @@
                   <a:srgbClr val="2B2B2B"/>
                 </a:solidFill>
               </a:rPr>
-              <a:t>1. HAFTA</a:t>
+              <a:t>10. HAFTA</a:t>
             </a:r>
             <a:endParaRPr lang="en-US" sz="1600" dirty="0"/>
           </a:p>
@@ -1620,7 +2015,7 @@
                   <a:srgbClr val="2B2B2B"/>
                 </a:solidFill>
               </a:rPr>
-              <a:t>01 - 05 Aralık</a:t>
+              <a:t>7 – 11 Aralık</a:t>
             </a:r>
             <a:endParaRPr lang="en-US" sz="1600" dirty="0"/>
           </a:p>
@@ -1653,13 +2048,13 @@
             <a:r>
               <a:rPr lang="en-US" sz="2200" b="1" i="1" dirty="0">
                 <a:solidFill>
-                  <a:srgbClr val="36454F"/>
+                  <a:srgbClr val="1F4E79"/>
                 </a:solidFill>
                 <a:latin typeface="Cambria" pitchFamily="34" charset="0"/>
                 <a:ea typeface="Cambria" pitchFamily="34" charset="-122"/>
                 <a:cs typeface="Cambria" pitchFamily="34" charset="-120"/>
               </a:rPr>
-              <a:t>"Küçük bir görev, büyük bir güven demektir."</a:t>
+              <a:t>"Adalet, herkese hakkı olanı vermektir."</a:t>
             </a:r>
             <a:endParaRPr lang="en-US" sz="2200" dirty="0"/>
           </a:p>
@@ -1699,7 +2094,7 @@
                   <a:srgbClr val="2B2B2B"/>
                 </a:solidFill>
               </a:rPr>
-              <a:t>Üzerimize düşeni zamanında yaparız.</a:t>
+              <a:t>Paylaşırken kimseyi kayırmayız.</a:t>
             </a:r>
             <a:endParaRPr lang="en-US" sz="1700" dirty="0"/>
           </a:p>
@@ -1717,7 +2112,7 @@
                   <a:srgbClr val="2B2B2B"/>
                 </a:solidFill>
               </a:rPr>
-              <a:t>Unuttuğumuzda telafi etmeye çalışırız.</a:t>
+              <a:t>Kurallar herkes için aynıdır.</a:t>
             </a:r>
             <a:endParaRPr lang="en-US" sz="1700" dirty="0"/>
           </a:p>
@@ -1735,7 +2130,7 @@
                   <a:srgbClr val="2B2B2B"/>
                 </a:solidFill>
               </a:rPr>
-              <a:t>Sorumluluk almak güven kazandırır.</a:t>
+              <a:t>Haksızlığa uğrayanın yanında oluruz.</a:t>
             </a:r>
             <a:endParaRPr lang="en-US" sz="1700" dirty="0"/>
           </a:p>
@@ -1753,377 +2148,7 @@
                   <a:srgbClr val="2B2B2B"/>
                 </a:solidFill>
               </a:rPr>
-              <a:t>Ortak eşyalara özen göstermek de sorumluluktur.</a:t>
-            </a:r>
-            <a:endParaRPr lang="en-US" sz="1700" dirty="0"/>
-          </a:p>
-        </p:txBody>
-      </p:sp>
-    </p:spTree>
-  </p:cSld>
-  <p:clrMapOvr>
-    <a:masterClrMapping/>
-  </p:clrMapOvr>
-</p:sld>
-</file>
-
-<file path=ppt/slides/slide3.xml><?xml version="1.0" encoding="utf-8"?>
-<p:sld xmlns:a="http://schemas.openxmlformats.org/drawingml/2006/main" xmlns:r="http://schemas.openxmlformats.org/officeDocument/2006/relationships" xmlns:p="http://schemas.openxmlformats.org/presentationml/2006/main">
-  <p:cSld name="Slide 3">
-    <p:bg>
-      <p:bgPr>
-        <a:solidFill>
-          <a:srgbClr val="FFFFFF"/>
-        </a:solidFill>
-      </p:bgPr>
-    </p:bg>
-    <p:spTree>
-      <p:nvGrpSpPr>
-        <p:cNvPr id="1" name=""/>
-        <p:cNvGrpSpPr/>
-        <p:nvPr/>
-      </p:nvGrpSpPr>
-      <p:grpSpPr>
-        <a:xfrm>
-          <a:off x="0" y="0"/>
-          <a:ext cx="0" cy="0"/>
-          <a:chOff x="0" y="0"/>
-          <a:chExt cx="0" cy="0"/>
-        </a:xfrm>
-      </p:grpSpPr>
-      <p:sp>
-        <p:nvSpPr>
-          <p:cNvPr id="2" name="Shape 0"/>
-          <p:cNvSpPr/>
-          <p:nvPr/>
-        </p:nvSpPr>
-        <p:spPr>
-          <a:xfrm>
-            <a:off x="0" y="0"/>
-            <a:ext cx="3840480" cy="6858000"/>
-          </a:xfrm>
-          <a:prstGeom prst="rect">
-            <a:avLst/>
-          </a:prstGeom>
-          <a:solidFill>
-            <a:srgbClr val="6D2E46"/>
-          </a:solidFill>
-          <a:ln/>
-        </p:spPr>
-      </p:sp>
-      <p:sp>
-        <p:nvSpPr>
-          <p:cNvPr id="3" name="Text 1"/>
-          <p:cNvSpPr/>
-          <p:nvPr/>
-        </p:nvSpPr>
-        <p:spPr>
-          <a:xfrm>
-            <a:off x="274320" y="457200"/>
-            <a:ext cx="3291840" cy="1645920"/>
-          </a:xfrm>
-          <a:prstGeom prst="rect">
-            <a:avLst/>
-          </a:prstGeom>
-          <a:noFill/>
-          <a:ln/>
-        </p:spPr>
-        <p:txBody>
-          <a:bodyPr wrap="square" rtlCol="0" anchor="ctr"/>
-          <a:lstStyle/>
-          <a:p>
-            <a:pPr algn="ctr" indent="0" marL="0">
-              <a:buNone/>
-            </a:pPr>
-            <a:r>
-              <a:rPr lang="en-US" sz="8000" dirty="0">
-                <a:solidFill>
-                  <a:srgbClr val="000000"/>
-                </a:solidFill>
-              </a:rPr>
-              <a:t>🧼</a:t>
-            </a:r>
-            <a:endParaRPr lang="en-US" sz="8000" dirty="0"/>
-          </a:p>
-        </p:txBody>
-      </p:sp>
-      <p:sp>
-        <p:nvSpPr>
-          <p:cNvPr id="4" name="Text 2"/>
-          <p:cNvSpPr/>
-          <p:nvPr/>
-        </p:nvSpPr>
-        <p:spPr>
-          <a:xfrm>
-            <a:off x="274320" y="2194560"/>
-            <a:ext cx="3291840" cy="914400"/>
-          </a:xfrm>
-          <a:prstGeom prst="rect">
-            <a:avLst/>
-          </a:prstGeom>
-          <a:noFill/>
-          <a:ln/>
-        </p:spPr>
-        <p:txBody>
-          <a:bodyPr wrap="square" rtlCol="0" anchor="ctr"/>
-          <a:lstStyle/>
-          <a:p>
-            <a:pPr algn="ctr" indent="0" marL="0">
-              <a:buNone/>
-            </a:pPr>
-            <a:r>
-              <a:rPr lang="en-US" sz="2600" b="1" dirty="0">
-                <a:solidFill>
-                  <a:srgbClr val="FFFFFF"/>
-                </a:solidFill>
-                <a:latin typeface="Cambria" pitchFamily="34" charset="0"/>
-                <a:ea typeface="Cambria" pitchFamily="34" charset="-122"/>
-                <a:cs typeface="Cambria" pitchFamily="34" charset="-120"/>
-              </a:rPr>
-              <a:t>TEMİZLİK</a:t>
-            </a:r>
-            <a:endParaRPr lang="en-US" sz="2600" dirty="0"/>
-          </a:p>
-        </p:txBody>
-      </p:sp>
-      <p:sp>
-        <p:nvSpPr>
-          <p:cNvPr id="5" name="Text 3"/>
-          <p:cNvSpPr/>
-          <p:nvPr/>
-        </p:nvSpPr>
-        <p:spPr>
-          <a:xfrm>
-            <a:off x="274320" y="3017520"/>
-            <a:ext cx="3291840" cy="1280160"/>
-          </a:xfrm>
-          <a:prstGeom prst="rect">
-            <a:avLst/>
-          </a:prstGeom>
-          <a:noFill/>
-          <a:ln/>
-        </p:spPr>
-        <p:txBody>
-          <a:bodyPr wrap="square" rtlCol="0" anchor="ctr"/>
-          <a:lstStyle/>
-          <a:p>
-            <a:pPr algn="ctr" indent="0" marL="0">
-              <a:buNone/>
-            </a:pPr>
-            <a:r>
-              <a:rPr lang="en-US" sz="1500" i="1" dirty="0">
-                <a:solidFill>
-                  <a:srgbClr val="FFFFFF"/>
-                </a:solidFill>
-              </a:rPr>
-              <a:t>Kişisel ve Çevresel Temizlik</a:t>
-            </a:r>
-            <a:endParaRPr lang="en-US" sz="1500" dirty="0"/>
-          </a:p>
-        </p:txBody>
-      </p:sp>
-      <p:sp>
-        <p:nvSpPr>
-          <p:cNvPr id="6" name="Shape 4"/>
-          <p:cNvSpPr/>
-          <p:nvPr/>
-        </p:nvSpPr>
-        <p:spPr>
-          <a:xfrm>
-            <a:off x="548640" y="4846320"/>
-            <a:ext cx="2743200" cy="1280160"/>
-          </a:xfrm>
-          <a:prstGeom prst="roundRect">
-            <a:avLst>
-              <a:gd name="adj" fmla="val 7143"/>
-            </a:avLst>
-          </a:prstGeom>
-          <a:solidFill>
-            <a:srgbClr val="FFFFFF">
-              <a:alpha val="85000"/>
-            </a:srgbClr>
-          </a:solidFill>
-          <a:ln/>
-        </p:spPr>
-      </p:sp>
-      <p:sp>
-        <p:nvSpPr>
-          <p:cNvPr id="7" name="Text 5"/>
-          <p:cNvSpPr/>
-          <p:nvPr/>
-        </p:nvSpPr>
-        <p:spPr>
-          <a:xfrm>
-            <a:off x="548640" y="4846320"/>
-            <a:ext cx="2743200" cy="1280160"/>
-          </a:xfrm>
-          <a:prstGeom prst="rect">
-            <a:avLst/>
-          </a:prstGeom>
-          <a:noFill/>
-          <a:ln/>
-        </p:spPr>
-        <p:txBody>
-          <a:bodyPr wrap="square" rtlCol="0" anchor="ctr"/>
-          <a:lstStyle/>
-          <a:p>
-            <a:pPr algn="ctr" indent="0" marL="0">
-              <a:buNone/>
-            </a:pPr>
-            <a:r>
-              <a:rPr lang="en-US" sz="1600" b="1" dirty="0">
-                <a:solidFill>
-                  <a:srgbClr val="2B2B2B"/>
-                </a:solidFill>
-              </a:rPr>
-              <a:t>2. HAFTA</a:t>
-            </a:r>
-            <a:endParaRPr lang="en-US" sz="1600" dirty="0"/>
-          </a:p>
-          <a:p>
-            <a:pPr algn="ctr" indent="0" marL="0">
-              <a:buNone/>
-            </a:pPr>
-            <a:r>
-              <a:rPr lang="en-US" sz="1600" b="1" dirty="0">
-                <a:solidFill>
-                  <a:srgbClr val="2B2B2B"/>
-                </a:solidFill>
-              </a:rPr>
-              <a:t>08 - 12 Aralık</a:t>
-            </a:r>
-            <a:endParaRPr lang="en-US" sz="1600" dirty="0"/>
-          </a:p>
-        </p:txBody>
-      </p:sp>
-      <p:sp>
-        <p:nvSpPr>
-          <p:cNvPr id="8" name="Text 6"/>
-          <p:cNvSpPr/>
-          <p:nvPr/>
-        </p:nvSpPr>
-        <p:spPr>
-          <a:xfrm>
-            <a:off x="4206240" y="457200"/>
-            <a:ext cx="7498080" cy="1188720"/>
-          </a:xfrm>
-          <a:prstGeom prst="rect">
-            <a:avLst/>
-          </a:prstGeom>
-          <a:noFill/>
-          <a:ln/>
-        </p:spPr>
-        <p:txBody>
-          <a:bodyPr wrap="square" rtlCol="0" anchor="ctr"/>
-          <a:lstStyle/>
-          <a:p>
-            <a:pPr indent="0" marL="0">
-              <a:buNone/>
-            </a:pPr>
-            <a:r>
-              <a:rPr lang="en-US" sz="2200" b="1" i="1" dirty="0">
-                <a:solidFill>
-                  <a:srgbClr val="36454F"/>
-                </a:solidFill>
-                <a:latin typeface="Cambria" pitchFamily="34" charset="0"/>
-                <a:ea typeface="Cambria" pitchFamily="34" charset="-122"/>
-                <a:cs typeface="Cambria" pitchFamily="34" charset="-120"/>
-              </a:rPr>
-              <a:t>"Temizlik, kendimize ve çevremize gösterdiğimiz saygıdır."</a:t>
-            </a:r>
-            <a:endParaRPr lang="en-US" sz="2200" dirty="0"/>
-          </a:p>
-        </p:txBody>
-      </p:sp>
-      <p:sp>
-        <p:nvSpPr>
-          <p:cNvPr id="9" name="Text 7"/>
-          <p:cNvSpPr/>
-          <p:nvPr/>
-        </p:nvSpPr>
-        <p:spPr>
-          <a:xfrm>
-            <a:off x="4206240" y="1828800"/>
-            <a:ext cx="7498080" cy="4389120"/>
-          </a:xfrm>
-          <a:prstGeom prst="rect">
-            <a:avLst/>
-          </a:prstGeom>
-          <a:noFill/>
-          <a:ln/>
-        </p:spPr>
-        <p:txBody>
-          <a:bodyPr wrap="square" rtlCol="0" anchor="ctr"/>
-          <a:lstStyle/>
-          <a:p>
-            <a:pPr marL="342900" indent="-342900">
-              <a:spcAft>
-                <a:spcPts val="1200"/>
-              </a:spcAft>
-              <a:buSzPct val="100000"/>
-              <a:buChar char="•"/>
-            </a:pPr>
-            <a:r>
-              <a:rPr lang="en-US" sz="1700" dirty="0">
-                <a:solidFill>
-                  <a:srgbClr val="2B2B2B"/>
-                </a:solidFill>
-              </a:rPr>
-              <a:t>Ellerimizi düzenli yıkarız.</a:t>
-            </a:r>
-            <a:endParaRPr lang="en-US" sz="1700" dirty="0"/>
-          </a:p>
-          <a:p>
-            <a:pPr marL="342900" indent="-342900">
-              <a:spcAft>
-                <a:spcPts val="1200"/>
-              </a:spcAft>
-              <a:buSzPct val="100000"/>
-              <a:buChar char="•"/>
-            </a:pPr>
-            <a:r>
-              <a:rPr lang="en-US" sz="1700" dirty="0">
-                <a:solidFill>
-                  <a:srgbClr val="2B2B2B"/>
-                </a:solidFill>
-              </a:rPr>
-              <a:t>Kullandığımız alanı temiz bırakırız.</a:t>
-            </a:r>
-            <a:endParaRPr lang="en-US" sz="1700" dirty="0"/>
-          </a:p>
-          <a:p>
-            <a:pPr marL="342900" indent="-342900">
-              <a:spcAft>
-                <a:spcPts val="1200"/>
-              </a:spcAft>
-              <a:buSzPct val="100000"/>
-              <a:buChar char="•"/>
-            </a:pPr>
-            <a:r>
-              <a:rPr lang="en-US" sz="1700" dirty="0">
-                <a:solidFill>
-                  <a:srgbClr val="2B2B2B"/>
-                </a:solidFill>
-              </a:rPr>
-              <a:t>Çöpümüzü çöp kutusuna atarız.</a:t>
-            </a:r>
-            <a:endParaRPr lang="en-US" sz="1700" dirty="0"/>
-          </a:p>
-          <a:p>
-            <a:pPr marL="342900" indent="-342900">
-              <a:spcAft>
-                <a:spcPts val="1200"/>
-              </a:spcAft>
-              <a:buSzPct val="100000"/>
-              <a:buChar char="•"/>
-            </a:pPr>
-            <a:r>
-              <a:rPr lang="en-US" sz="1700" dirty="0">
-                <a:solidFill>
-                  <a:srgbClr val="2B2B2B"/>
-                </a:solidFill>
-              </a:rPr>
-              <a:t>Temizlik hem sağlık hem saygı demektir.</a:t>
+              <a:t>Adalet, güven duygusunu güçlendirir.</a:t>
             </a:r>
             <a:endParaRPr lang="en-US" sz="1700" dirty="0"/>
           </a:p>
@@ -2176,10 +2201,14 @@
             <a:avLst/>
           </a:prstGeom>
           <a:solidFill>
-            <a:srgbClr val="6D2E46"/>
+            <a:srgbClr val="028090"/>
           </a:solidFill>
           <a:ln/>
         </p:spPr>
+        <p:txBody>
+          <a:bodyPr/>
+          <a:p/>
+        </p:txBody>
       </p:sp>
       <p:sp>
         <p:nvSpPr>
@@ -2211,7 +2240,7 @@
                   <a:srgbClr val="000000"/>
                 </a:solidFill>
               </a:rPr>
-              <a:t>🍎</a:t>
+              <a:t>🕊️</a:t>
             </a:r>
             <a:endParaRPr lang="en-US" sz="8000" dirty="0"/>
           </a:p>
@@ -2250,7 +2279,7 @@
                 <a:ea typeface="Cambria" pitchFamily="34" charset="-122"/>
                 <a:cs typeface="Cambria" pitchFamily="34" charset="-120"/>
               </a:rPr>
-              <a:t>SAĞLIKLI YAŞAM</a:t>
+              <a:t>ÖZGÜRLÜK</a:t>
             </a:r>
             <a:endParaRPr lang="en-US" sz="2600" dirty="0"/>
           </a:p>
@@ -2286,7 +2315,7 @@
                   <a:srgbClr val="FFFFFF"/>
                 </a:solidFill>
               </a:rPr>
-              <a:t>Beslenme, Hareket ve Uyku</a:t>
+              <a:t>Hakların ve Sınırların Dengesi</a:t>
             </a:r>
             <a:endParaRPr lang="en-US" sz="1500" dirty="0"/>
           </a:p>
@@ -2315,6 +2344,10 @@
           </a:solidFill>
           <a:ln/>
         </p:spPr>
+        <p:txBody>
+          <a:bodyPr/>
+          <a:p/>
+        </p:txBody>
       </p:sp>
       <p:sp>
         <p:nvSpPr>
@@ -2346,7 +2379,7 @@
                   <a:srgbClr val="2B2B2B"/>
                 </a:solidFill>
               </a:rPr>
-              <a:t>3. HAFTA</a:t>
+              <a:t>11. HAFTA</a:t>
             </a:r>
             <a:endParaRPr lang="en-US" sz="1600" dirty="0"/>
           </a:p>
@@ -2360,7 +2393,7 @@
                   <a:srgbClr val="2B2B2B"/>
                 </a:solidFill>
               </a:rPr>
-              <a:t>15 - 19 Aralık</a:t>
+              <a:t>14 – 18 Aralık</a:t>
             </a:r>
             <a:endParaRPr lang="en-US" sz="1600" dirty="0"/>
           </a:p>
@@ -2393,13 +2426,13 @@
             <a:r>
               <a:rPr lang="en-US" sz="2200" b="1" i="1" dirty="0">
                 <a:solidFill>
-                  <a:srgbClr val="36454F"/>
+                  <a:srgbClr val="1F4E79"/>
                 </a:solidFill>
                 <a:latin typeface="Cambria" pitchFamily="34" charset="0"/>
                 <a:ea typeface="Cambria" pitchFamily="34" charset="-122"/>
                 <a:cs typeface="Cambria" pitchFamily="34" charset="-120"/>
               </a:rPr>
-              <a:t>"Sağlıklı yaşam, güçlü ve mutlu olmanın anahtarıdır."</a:t>
+              <a:t>"Özgürlüğüm, başkasının özgürlüğüne saygı ile sınırlıdır."</a:t>
             </a:r>
             <a:endParaRPr lang="en-US" sz="2200" dirty="0"/>
           </a:p>
@@ -2439,7 +2472,7 @@
                   <a:srgbClr val="2B2B2B"/>
                 </a:solidFill>
               </a:rPr>
-              <a:t>Kahvaltımızı asla atlamayız.</a:t>
+              <a:t>Herkesin düşüncesini söyleme hakkı vardır.</a:t>
             </a:r>
             <a:endParaRPr lang="en-US" sz="1700" dirty="0"/>
           </a:p>
@@ -2457,7 +2490,7 @@
                   <a:srgbClr val="2B2B2B"/>
                 </a:solidFill>
               </a:rPr>
-              <a:t>Her gün biraz hareket ederiz.</a:t>
+              <a:t>Özgürlük, kurallarla birlikte anlamlıdır.</a:t>
             </a:r>
             <a:endParaRPr lang="en-US" sz="1700" dirty="0"/>
           </a:p>
@@ -2475,7 +2508,7 @@
                   <a:srgbClr val="2B2B2B"/>
                 </a:solidFill>
               </a:rPr>
-              <a:t>Yeterince ve düzenli uyuruz.</a:t>
+              <a:t>Başkalarının hakkına saygı gösteririz.</a:t>
             </a:r>
             <a:endParaRPr lang="en-US" sz="1700" dirty="0"/>
           </a:p>
@@ -2493,7 +2526,7 @@
                   <a:srgbClr val="2B2B2B"/>
                 </a:solidFill>
               </a:rPr>
-              <a:t>Suyu unutmadan içeriz.</a:t>
+              <a:t>Seçim yapabilmek büyük bir değerdir.</a:t>
             </a:r>
             <a:endParaRPr lang="en-US" sz="1700" dirty="0"/>
           </a:p>
@@ -2508,6 +2541,384 @@
 </file>
 
 <file path=ppt/slides/slide5.xml><?xml version="1.0" encoding="utf-8"?>
+<p:sld xmlns:a="http://schemas.openxmlformats.org/drawingml/2006/main" xmlns:p="http://schemas.openxmlformats.org/presentationml/2006/main" xmlns:r="http://schemas.openxmlformats.org/officeDocument/2006/relationships">
+  <p:cSld name="Slide 3">
+    <p:bg>
+      <p:bgPr>
+        <a:solidFill>
+          <a:srgbClr val="FFFFFF"/>
+        </a:solidFill>
+      </p:bgPr>
+    </p:bg>
+    <p:spTree>
+      <p:nvGrpSpPr>
+        <p:cNvPr id="1" name=""/>
+        <p:cNvGrpSpPr/>
+        <p:nvPr/>
+      </p:nvGrpSpPr>
+      <p:grpSpPr>
+        <a:xfrm>
+          <a:off x="0" y="0"/>
+          <a:ext cx="0" cy="0"/>
+          <a:chOff x="0" y="0"/>
+          <a:chExt cx="0" cy="0"/>
+        </a:xfrm>
+      </p:grpSpPr>
+      <p:sp>
+        <p:nvSpPr>
+          <p:cNvPr id="2" name="Shape 0"/>
+          <p:cNvSpPr/>
+          <p:nvPr/>
+        </p:nvSpPr>
+        <p:spPr>
+          <a:xfrm>
+            <a:off x="0" y="0"/>
+            <a:ext cx="3840480" cy="6858000"/>
+          </a:xfrm>
+          <a:prstGeom prst="rect">
+            <a:avLst/>
+          </a:prstGeom>
+          <a:solidFill>
+            <a:srgbClr val="028090"/>
+          </a:solidFill>
+          <a:ln/>
+        </p:spPr>
+        <p:txBody>
+          <a:bodyPr/>
+          <a:p/>
+        </p:txBody>
+      </p:sp>
+      <p:sp>
+        <p:nvSpPr>
+          <p:cNvPr id="3" name="Text 1"/>
+          <p:cNvSpPr/>
+          <p:nvPr/>
+        </p:nvSpPr>
+        <p:spPr>
+          <a:xfrm>
+            <a:off x="274320" y="457200"/>
+            <a:ext cx="3291840" cy="1645920"/>
+          </a:xfrm>
+          <a:prstGeom prst="rect">
+            <a:avLst/>
+          </a:prstGeom>
+          <a:noFill/>
+          <a:ln/>
+        </p:spPr>
+        <p:txBody>
+          <a:bodyPr wrap="square" rtlCol="0" anchor="ctr"/>
+          <a:lstStyle/>
+          <a:p>
+            <a:pPr algn="ctr" indent="0" marL="0">
+              <a:buNone/>
+            </a:pPr>
+            <a:r>
+              <a:rPr lang="en-US" sz="8000" dirty="0">
+                <a:solidFill>
+                  <a:srgbClr val="000000"/>
+                </a:solidFill>
+              </a:rPr>
+              <a:t>🤥</a:t>
+            </a:r>
+            <a:endParaRPr lang="en-US" sz="8000" dirty="0"/>
+          </a:p>
+        </p:txBody>
+      </p:sp>
+      <p:sp>
+        <p:nvSpPr>
+          <p:cNvPr id="4" name="Text 2"/>
+          <p:cNvSpPr/>
+          <p:nvPr/>
+        </p:nvSpPr>
+        <p:spPr>
+          <a:xfrm>
+            <a:off x="274320" y="2194560"/>
+            <a:ext cx="3291840" cy="914400"/>
+          </a:xfrm>
+          <a:prstGeom prst="rect">
+            <a:avLst/>
+          </a:prstGeom>
+          <a:noFill/>
+          <a:ln/>
+        </p:spPr>
+        <p:txBody>
+          <a:bodyPr wrap="square" rtlCol="0" anchor="ctr"/>
+          <a:lstStyle/>
+          <a:p>
+            <a:pPr algn="ctr" indent="0" marL="0">
+              <a:buNone/>
+            </a:pPr>
+            <a:r>
+              <a:rPr lang="en-US" sz="2600" b="1" dirty="0">
+                <a:solidFill>
+                  <a:srgbClr val="FFFFFF"/>
+                </a:solidFill>
+                <a:latin typeface="Cambria" pitchFamily="34" charset="0"/>
+                <a:ea typeface="Cambria" pitchFamily="34" charset="-122"/>
+                <a:cs typeface="Cambria" pitchFamily="34" charset="-120"/>
+              </a:rPr>
+              <a:t>DÜRÜSTLÜK</a:t>
+            </a:r>
+            <a:endParaRPr lang="en-US" sz="2600" dirty="0"/>
+          </a:p>
+        </p:txBody>
+      </p:sp>
+      <p:sp>
+        <p:nvSpPr>
+          <p:cNvPr id="5" name="Text 3"/>
+          <p:cNvSpPr/>
+          <p:nvPr/>
+        </p:nvSpPr>
+        <p:spPr>
+          <a:xfrm>
+            <a:off x="274320" y="3017520"/>
+            <a:ext cx="3291840" cy="1280160"/>
+          </a:xfrm>
+          <a:prstGeom prst="rect">
+            <a:avLst/>
+          </a:prstGeom>
+          <a:noFill/>
+          <a:ln/>
+        </p:spPr>
+        <p:txBody>
+          <a:bodyPr wrap="square" rtlCol="0" anchor="ctr"/>
+          <a:lstStyle/>
+          <a:p>
+            <a:pPr algn="ctr" indent="0" marL="0">
+              <a:buNone/>
+            </a:pPr>
+            <a:r>
+              <a:rPr lang="en-US" sz="1500" i="1" dirty="0">
+                <a:solidFill>
+                  <a:srgbClr val="FFFFFF"/>
+                </a:solidFill>
+              </a:rPr>
+              <a:t>Doğruyu Söylemenin Değeri</a:t>
+            </a:r>
+            <a:endParaRPr lang="en-US" sz="1500" dirty="0"/>
+          </a:p>
+        </p:txBody>
+      </p:sp>
+      <p:sp>
+        <p:nvSpPr>
+          <p:cNvPr id="6" name="Shape 4"/>
+          <p:cNvSpPr/>
+          <p:nvPr/>
+        </p:nvSpPr>
+        <p:spPr>
+          <a:xfrm>
+            <a:off x="548640" y="4846320"/>
+            <a:ext cx="2743200" cy="1280160"/>
+          </a:xfrm>
+          <a:prstGeom prst="roundRect">
+            <a:avLst>
+              <a:gd name="adj" fmla="val 7143"/>
+            </a:avLst>
+          </a:prstGeom>
+          <a:solidFill>
+            <a:srgbClr val="FFFFFF">
+              <a:alpha val="85000"/>
+            </a:srgbClr>
+          </a:solidFill>
+          <a:ln/>
+        </p:spPr>
+        <p:txBody>
+          <a:bodyPr/>
+          <a:p/>
+        </p:txBody>
+      </p:sp>
+      <p:sp>
+        <p:nvSpPr>
+          <p:cNvPr id="7" name="Text 5"/>
+          <p:cNvSpPr/>
+          <p:nvPr/>
+        </p:nvSpPr>
+        <p:spPr>
+          <a:xfrm>
+            <a:off x="548640" y="4846320"/>
+            <a:ext cx="2743200" cy="1280160"/>
+          </a:xfrm>
+          <a:prstGeom prst="rect">
+            <a:avLst/>
+          </a:prstGeom>
+          <a:noFill/>
+          <a:ln/>
+        </p:spPr>
+        <p:txBody>
+          <a:bodyPr wrap="square" rtlCol="0" anchor="ctr"/>
+          <a:lstStyle/>
+          <a:p>
+            <a:pPr algn="ctr" indent="0" marL="0">
+              <a:buNone/>
+            </a:pPr>
+            <a:r>
+              <a:rPr lang="en-US" sz="1600" b="1" dirty="0">
+                <a:solidFill>
+                  <a:srgbClr val="2B2B2B"/>
+                </a:solidFill>
+              </a:rPr>
+              <a:t>12 ve 13. HAFTA</a:t>
+            </a:r>
+            <a:endParaRPr lang="en-US" sz="1600" dirty="0"/>
+          </a:p>
+          <a:p>
+            <a:pPr algn="ctr" indent="0" marL="0">
+              <a:buNone/>
+            </a:pPr>
+            <a:r>
+              <a:rPr lang="en-US" sz="1600" b="1" dirty="0">
+                <a:solidFill>
+                  <a:srgbClr val="2B2B2B"/>
+                </a:solidFill>
+              </a:rPr>
+              <a:t>21 Aralık – 1 Ocak</a:t>
+            </a:r>
+            <a:endParaRPr lang="en-US" sz="1600" dirty="0"/>
+          </a:p>
+        </p:txBody>
+      </p:sp>
+      <p:sp>
+        <p:nvSpPr>
+          <p:cNvPr id="8" name="Text 6"/>
+          <p:cNvSpPr/>
+          <p:nvPr/>
+        </p:nvSpPr>
+        <p:spPr>
+          <a:xfrm>
+            <a:off x="4206240" y="457200"/>
+            <a:ext cx="7498080" cy="1188720"/>
+          </a:xfrm>
+          <a:prstGeom prst="rect">
+            <a:avLst/>
+          </a:prstGeom>
+          <a:noFill/>
+          <a:ln/>
+        </p:spPr>
+        <p:txBody>
+          <a:bodyPr wrap="square" rtlCol="0" anchor="ctr"/>
+          <a:lstStyle/>
+          <a:p>
+            <a:pPr indent="0" marL="0">
+              <a:buNone/>
+            </a:pPr>
+            <a:r>
+              <a:rPr lang="en-US" sz="2200" b="1" i="1" dirty="0">
+                <a:solidFill>
+                  <a:srgbClr val="1F4E79"/>
+                </a:solidFill>
+                <a:latin typeface="Cambria" pitchFamily="34" charset="0"/>
+                <a:ea typeface="Cambria" pitchFamily="34" charset="-122"/>
+                <a:cs typeface="Cambria" pitchFamily="34" charset="-120"/>
+              </a:rPr>
+              <a:t>"Doğruyu söylemek cesaret ister, ama içimizi rahatlatır."</a:t>
+            </a:r>
+            <a:endParaRPr lang="en-US" sz="2200" dirty="0"/>
+          </a:p>
+        </p:txBody>
+      </p:sp>
+      <p:sp>
+        <p:nvSpPr>
+          <p:cNvPr id="9" name="Text 7"/>
+          <p:cNvSpPr/>
+          <p:nvPr/>
+        </p:nvSpPr>
+        <p:spPr>
+          <a:xfrm>
+            <a:off x="4206240" y="1828800"/>
+            <a:ext cx="7498080" cy="4389120"/>
+          </a:xfrm>
+          <a:prstGeom prst="rect">
+            <a:avLst/>
+          </a:prstGeom>
+          <a:noFill/>
+          <a:ln/>
+        </p:spPr>
+        <p:txBody>
+          <a:bodyPr wrap="square" rtlCol="0" anchor="ctr"/>
+          <a:lstStyle/>
+          <a:p>
+            <a:pPr marL="342900" indent="-342900">
+              <a:spcAft>
+                <a:spcPts val="1200"/>
+              </a:spcAft>
+              <a:buSzPct val="100000"/>
+              <a:buChar char="•"/>
+            </a:pPr>
+            <a:r>
+              <a:rPr lang="en-US" sz="1700" dirty="0">
+                <a:solidFill>
+                  <a:srgbClr val="2B2B2B"/>
+                </a:solidFill>
+              </a:rPr>
+              <a:t>Hata yapmak insanlıktır, önemli olan doğruyu söylemektir.</a:t>
+            </a:r>
+            <a:endParaRPr lang="en-US" sz="1700" dirty="0"/>
+          </a:p>
+          <a:p>
+            <a:pPr marL="342900" indent="-342900">
+              <a:spcAft>
+                <a:spcPts val="1200"/>
+              </a:spcAft>
+              <a:buSzPct val="100000"/>
+              <a:buChar char="•"/>
+            </a:pPr>
+            <a:r>
+              <a:rPr lang="en-US" sz="1700" dirty="0">
+                <a:solidFill>
+                  <a:srgbClr val="2B2B2B"/>
+                </a:solidFill>
+              </a:rPr>
+              <a:t>Yalan, küçük görünse de güveni zedeler.</a:t>
+            </a:r>
+            <a:endParaRPr lang="en-US" sz="1700" dirty="0"/>
+          </a:p>
+          <a:p>
+            <a:pPr marL="342900" indent="-342900">
+              <a:spcAft>
+                <a:spcPts val="1200"/>
+              </a:spcAft>
+              <a:buSzPct val="100000"/>
+              <a:buChar char="•"/>
+            </a:pPr>
+            <a:r>
+              <a:rPr lang="en-US" sz="1700" dirty="0">
+                <a:solidFill>
+                  <a:srgbClr val="2B2B2B"/>
+                </a:solidFill>
+              </a:rPr>
+              <a:t>Dürüst insanlara herkes güvenir.</a:t>
+            </a:r>
+            <a:endParaRPr lang="en-US" sz="1700" dirty="0"/>
+          </a:p>
+          <a:p>
+            <a:pPr marL="342900" indent="-342900">
+              <a:spcAft>
+                <a:spcPts val="1200"/>
+              </a:spcAft>
+              <a:buSzPct val="100000"/>
+              <a:buChar char="•"/>
+            </a:pPr>
+            <a:r>
+              <a:rPr lang="en-US" sz="1700" dirty="0">
+                <a:solidFill>
+                  <a:srgbClr val="2B2B2B"/>
+                </a:solidFill>
+              </a:rPr>
+              <a:t>Söz verdiğimizde tutarız.</a:t>
+            </a:r>
+            <a:endParaRPr lang="en-US" sz="1700" dirty="0"/>
+          </a:p>
+        </p:txBody>
+      </p:sp>
+    </p:spTree>
+  </p:cSld>
+  <p:clrMapOvr>
+    <a:masterClrMapping/>
+  </p:clrMapOvr>
+</p:sld>
+</file>
+
+<file path=ppt/slides/slide6.xml><?xml version="1.0" encoding="utf-8"?>
 <p:sld xmlns:a="http://schemas.openxmlformats.org/drawingml/2006/main" xmlns:r="http://schemas.openxmlformats.org/officeDocument/2006/relationships" xmlns:p="http://schemas.openxmlformats.org/presentationml/2006/main">
   <p:cSld name="Slide 5">
     <p:bg>
@@ -2600,7 +3011,7 @@
                   <a:srgbClr val="F9E795"/>
                 </a:solidFill>
               </a:rPr>
-              <a:t>SORUMLULUK • TEMİZLİK • SAĞLIKLI YAŞAM</a:t>
+              <a:t>DUYARLILIK • ADALET • ÖZGÜRLÜK • DÜRÜSTLÜK</a:t>
             </a:r>
             <a:endParaRPr lang="en-US" sz="2200" dirty="0"/>
           </a:p>
